--- a/dist/초2/국어/이야기와쓰기/초2_국어_이야기와쓰기_01_일이일어난차례_학생용.pptx
+++ b/dist/초2/국어/이야기와쓰기/초2_국어_이야기와쓰기_01_일이일어난차례_학생용.pptx
@@ -118,38 +118,38 @@
   <p:extLst>
     <p:ext uri="{521415D9-36F7-43E2-AB2F-B90AF26B5E84}">
       <p14:sectionLst xmlns:p14="http://schemas.microsoft.com/office/powerpoint/2010/main">
-        <p14:section name="도입" id="{989cc5d0-d67c-306f-37e6-1d95202367e1}">
+        <p14:section name="도입" id="{532e1772-4f0b-273e-fd76-d837c2ee9ba6}">
           <p14:sldIdLst>
             <p14:sldId id="256"/>
             <p14:sldId id="257"/>
           </p14:sldIdLst>
         </p14:section>
-        <p14:section name="개념" id="{5b4ed65b-44db-4fa4-1cac-ca44b2154bee}">
+        <p14:section name="개념" id="{e200242c-b675-c20b-a928-89afe056d30c}">
           <p14:sldIdLst>
             <p14:sldId id="258"/>
             <p14:sldId id="259"/>
             <p14:sldId id="260"/>
           </p14:sldIdLst>
         </p14:section>
-        <p14:section name="연습" id="{a95df94e-0ae3-7b40-3194-2ccca8aa9488}">
+        <p14:section name="연습" id="{f859b206-27b1-01fe-3219-a325477cd416}">
           <p14:sldIdLst>
             <p14:sldId id="261"/>
             <p14:sldId id="262"/>
             <p14:sldId id="263"/>
           </p14:sldIdLst>
         </p14:section>
-        <p14:section name="확인" id="{2b8e25a4-e115-45e1-846d-28fccbd6d6dc}">
+        <p14:section name="확인" id="{421c8e0e-4ab0-850d-c605-5167aa53d14c}">
           <p14:sldIdLst>
             <p14:sldId id="264"/>
             <p14:sldId id="265"/>
           </p14:sldIdLst>
         </p14:section>
-        <p14:section name="정리" id="{e7ab2f79-8622-8986-baf6-607d26f9a161}">
+        <p14:section name="정리" id="{2a614509-3691-0bd9-64ed-3bfefc4f7c6b}">
           <p14:sldIdLst>
             <p14:sldId id="266"/>
           </p14:sldIdLst>
         </p14:section>
-        <p14:section name="보충" id="{3ae22d49-f27b-e9f4-da98-0fe2c0e3b49d}">
+        <p14:section name="보충" id="{0dad870f-4dd0-dce5-ab90-39d9ee669009}">
           <p14:sldIdLst>
             <p14:sldId id="267"/>
           </p14:sldIdLst>

--- a/dist/초2/국어/이야기와쓰기/초2_국어_이야기와쓰기_01_일이일어난차례_학생용.pptx
+++ b/dist/초2/국어/이야기와쓰기/초2_국어_이야기와쓰기_01_일이일어난차례_학생용.pptx
@@ -118,38 +118,38 @@
   <p:extLst>
     <p:ext uri="{521415D9-36F7-43E2-AB2F-B90AF26B5E84}">
       <p14:sectionLst xmlns:p14="http://schemas.microsoft.com/office/powerpoint/2010/main">
-        <p14:section name="도입" id="{532e1772-4f0b-273e-fd76-d837c2ee9ba6}">
+        <p14:section name="도입" id="{c17a0ca4-6feb-53a7-f7ae-e92e35f9622a}">
           <p14:sldIdLst>
             <p14:sldId id="256"/>
             <p14:sldId id="257"/>
           </p14:sldIdLst>
         </p14:section>
-        <p14:section name="개념" id="{e200242c-b675-c20b-a928-89afe056d30c}">
+        <p14:section name="개념" id="{e92fcdef-b0fb-c5e6-ee4d-53c40dd3aa74}">
           <p14:sldIdLst>
             <p14:sldId id="258"/>
             <p14:sldId id="259"/>
             <p14:sldId id="260"/>
           </p14:sldIdLst>
         </p14:section>
-        <p14:section name="연습" id="{f859b206-27b1-01fe-3219-a325477cd416}">
+        <p14:section name="연습" id="{d6920d0d-d8dd-24b1-ea7c-8afd33ccc9e4}">
           <p14:sldIdLst>
             <p14:sldId id="261"/>
             <p14:sldId id="262"/>
             <p14:sldId id="263"/>
           </p14:sldIdLst>
         </p14:section>
-        <p14:section name="확인" id="{421c8e0e-4ab0-850d-c605-5167aa53d14c}">
+        <p14:section name="확인" id="{4ecee3b9-66a8-bc95-e51a-8859fa4926de}">
           <p14:sldIdLst>
             <p14:sldId id="264"/>
             <p14:sldId id="265"/>
           </p14:sldIdLst>
         </p14:section>
-        <p14:section name="정리" id="{2a614509-3691-0bd9-64ed-3bfefc4f7c6b}">
+        <p14:section name="정리" id="{2a5a0950-0d4f-3cde-b945-a2a2decd5df1}">
           <p14:sldIdLst>
             <p14:sldId id="266"/>
           </p14:sldIdLst>
         </p14:section>
-        <p14:section name="보충" id="{0dad870f-4dd0-dce5-ab90-39d9ee669009}">
+        <p14:section name="보충" id="{8ebd8e3c-115c-69ba-7bcf-ccdc2e6c155e}">
           <p14:sldIdLst>
             <p14:sldId id="267"/>
           </p14:sldIdLst>
